--- a/0次案/卒研発表_nomovie.pptx
+++ b/0次案/卒研発表_nomovie.pptx
@@ -660,35 +660,59 @@
             </a:br>
             <a:r>
               <a:rPr lang="ja-JP" altLang="ja-JP" dirty="0"/>
-              <a:t>今回の実験では、物理ネットワークの規模とVN要求の仮想ノード数を同時に変更しているため、今後は仮想ノード数を固定し、物理ネットワークの規模だけを変更して再評価します。</a:t>
+              <a:t>今回の実験では、物理ネットワークの規模とVN要求の仮想ノード数を同時に変更しているため、今後は仮想ノード数を固定し、物理ネットワークの規模だけを変更して再評価し</a:t>
+            </a:r>
+            <a:r>
+              <a:rPr lang="ja-JP" altLang="en-US" dirty="0"/>
+              <a:t>ていきたいです</a:t>
+            </a:r>
+            <a:r>
+              <a:rPr lang="ja-JP" altLang="ja-JP" dirty="0"/>
+              <a:t>。</a:t>
             </a:r>
             <a:br>
               <a:rPr lang="ja-JP" altLang="ja-JP" dirty="0"/>
             </a:br>
             <a:r>
               <a:rPr lang="ja-JP" altLang="ja-JP" dirty="0"/>
-              <a:t>また、二ノ宮手法の実行時間が短くなった原因を明らかにするため、処理ごとの実行時間とVN要求の棄却数を計測します。</a:t>
+              <a:t>また、二ノ宮手法の実行時間が短くなった原因を明らかにするため、処理ごとの実行時間とVN要求の棄却数を計測</a:t>
+            </a:r>
+            <a:r>
+              <a:rPr lang="ja-JP" altLang="en-US" dirty="0"/>
+              <a:t>していきたいです</a:t>
+            </a:r>
+            <a:r>
+              <a:rPr lang="ja-JP" altLang="ja-JP" dirty="0"/>
+              <a:t>。</a:t>
             </a:r>
             <a:br>
               <a:rPr lang="ja-JP" altLang="ja-JP" dirty="0"/>
             </a:br>
             <a:r>
               <a:rPr lang="ja-JP" altLang="ja-JP" dirty="0"/>
-              <a:t>さらに、現在はネットワークを有向グラフとして扱っているため、本研究で想定している無向グラフへ変更し、再評価を行います。</a:t>
+              <a:t>さらに、現在はネットワークを有向グラフとして扱っているため、本研究で想定している無向グラフへ変更し、再評価を行</a:t>
+            </a:r>
+            <a:r>
+              <a:rPr lang="ja-JP" altLang="en-US" dirty="0"/>
+              <a:t>っていきたいです</a:t>
+            </a:r>
+            <a:r>
+              <a:rPr lang="ja-JP" altLang="ja-JP" dirty="0"/>
+              <a:t>。</a:t>
             </a:r>
             <a:endParaRPr lang="en-US" altLang="ja-JP" dirty="0"/>
           </a:p>
           <a:p>
             <a:r>
-              <a:rPr lang="ja-JP" altLang="ja-JP" dirty="0"/>
+              <a:rPr lang="ja-JP" altLang="ja-JP"/>
               <a:t>以上で発表を終わります。</a:t>
             </a:r>
             <a:br>
-              <a:rPr lang="ja-JP" altLang="ja-JP" dirty="0"/>
+              <a:rPr lang="ja-JP" altLang="ja-JP"/>
             </a:br>
             <a:r>
-              <a:rPr lang="ja-JP" altLang="ja-JP" dirty="0"/>
-              <a:t>ご清聴ありがとうございました。</a:t>
+              <a:rPr lang="ja-JP" altLang="ja-JP"/>
+              <a:t>ありがとうございました。</a:t>
             </a:r>
             <a:endParaRPr kumimoji="1" lang="ja-JP" altLang="en-US" dirty="0"/>
           </a:p>

--- a/0次案/卒研発表_nomovie.pptx
+++ b/0次案/卒研発表_nomovie.pptx
@@ -660,11 +660,11 @@
             </a:br>
             <a:r>
               <a:rPr lang="ja-JP" altLang="ja-JP" dirty="0"/>
-              <a:t>今回の実験では、物理ネットワークの規模とVN要求の仮想ノード数を同時に変更しているため、今後は仮想ノード数を固定し、物理ネットワークの規模だけを変更して再評価し</a:t>
+              <a:t>今回の実験では、物理ネットワークの規模とVN要求の仮想ノード数を同時に変更しているため、今後は仮想ノード数を固定し、物理ネットワークの規模だけを変更して再評価</a:t>
             </a:r>
             <a:r>
               <a:rPr lang="ja-JP" altLang="en-US" dirty="0"/>
-              <a:t>ていきたいです</a:t>
+              <a:t>すること</a:t>
             </a:r>
             <a:r>
               <a:rPr lang="ja-JP" altLang="ja-JP" dirty="0"/>
@@ -679,7 +679,7 @@
             </a:r>
             <a:r>
               <a:rPr lang="ja-JP" altLang="en-US" dirty="0"/>
-              <a:t>していきたいです</a:t>
+              <a:t>すること</a:t>
             </a:r>
             <a:r>
               <a:rPr lang="ja-JP" altLang="ja-JP" dirty="0"/>
@@ -690,11 +690,11 @@
             </a:br>
             <a:r>
               <a:rPr lang="ja-JP" altLang="ja-JP" dirty="0"/>
-              <a:t>さらに、現在はネットワークを有向グラフとして扱っているため、本研究で想定している無向グラフへ変更し、再評価を行</a:t>
+              <a:t>さらに、現在はネットワークを有向グラフとして扱っているため、本研究で想定している無向グラフへ変更し、再評価</a:t>
             </a:r>
             <a:r>
               <a:rPr lang="ja-JP" altLang="en-US" dirty="0"/>
-              <a:t>っていきたいです</a:t>
+              <a:t>行うこと</a:t>
             </a:r>
             <a:r>
               <a:rPr lang="ja-JP" altLang="ja-JP" dirty="0"/>
@@ -704,14 +704,21 @@
           </a:p>
           <a:p>
             <a:r>
-              <a:rPr lang="ja-JP" altLang="ja-JP"/>
+              <a:rPr lang="ja-JP" altLang="en-US" dirty="0"/>
+              <a:t>の３つが挙げられます</a:t>
+            </a:r>
+            <a:endParaRPr lang="en-US" altLang="ja-JP" dirty="0"/>
+          </a:p>
+          <a:p>
+            <a:r>
+              <a:rPr lang="ja-JP" altLang="ja-JP" dirty="0"/>
               <a:t>以上で発表を終わります。</a:t>
             </a:r>
             <a:br>
-              <a:rPr lang="ja-JP" altLang="ja-JP"/>
+              <a:rPr lang="ja-JP" altLang="ja-JP" dirty="0"/>
             </a:br>
             <a:r>
-              <a:rPr lang="ja-JP" altLang="ja-JP"/>
+              <a:rPr lang="ja-JP" altLang="ja-JP" dirty="0"/>
               <a:t>ありがとうございました。</a:t>
             </a:r>
             <a:endParaRPr kumimoji="1" lang="ja-JP" altLang="en-US" dirty="0"/>
@@ -837,7 +844,7 @@
           <a:p>
             <a:r>
               <a:rPr lang="ja-JP" altLang="ja-JP" dirty="0"/>
-              <a:t>また、VNEはNP困難な問題であるため、実用的な時間で解を求める発見的な手法が用いられます。</a:t>
+              <a:t>VNEはNP困難な問題であるため、実用的な時間で解を求める発見的な手法が用いられます。</a:t>
             </a:r>
           </a:p>
           <a:p>
@@ -1049,7 +1056,23 @@
           <a:p>
             <a:r>
               <a:rPr lang="ja-JP" altLang="ja-JP" dirty="0"/>
-              <a:t>本研究では、この2つの手法をVNEシミュレータであるALEVINへ実装しました。</a:t>
+              <a:t>本研究では、この2つの手法を</a:t>
+            </a:r>
+            <a:r>
+              <a:rPr lang="ja-JP" altLang="en-US" dirty="0"/>
+              <a:t>フィッシャーさんによって開発された</a:t>
+            </a:r>
+            <a:r>
+              <a:rPr lang="ja-JP" altLang="ja-JP" dirty="0"/>
+              <a:t>VNE</a:t>
+            </a:r>
+            <a:r>
+              <a:rPr lang="ja-JP" altLang="en-US" dirty="0"/>
+              <a:t>プラットフォーム</a:t>
+            </a:r>
+            <a:r>
+              <a:rPr lang="ja-JP" altLang="ja-JP" dirty="0"/>
+              <a:t>であるALEVINへ実装しました。</a:t>
             </a:r>
           </a:p>
           <a:p>
@@ -1159,11 +1182,31 @@
               <a:rPr lang="ja-JP" altLang="ja-JP" dirty="0"/>
               <a:t>ここでは、実際にALEVINがどのように動作するのかを動画で見ていただきます。</a:t>
             </a:r>
-          </a:p>
-          <a:p>
+            <a:endParaRPr lang="en-US" altLang="ja-JP" dirty="0"/>
+          </a:p>
+          <a:p>
+            <a:r>
+              <a:rPr lang="ja-JP" altLang="en-US" dirty="0"/>
+              <a:t>このように一番左側に物理ネットワーク、右側に</a:t>
+            </a:r>
+            <a:r>
+              <a:rPr lang="en-US" altLang="ja-JP" dirty="0"/>
+              <a:t>VN</a:t>
+            </a:r>
+            <a:r>
+              <a:rPr lang="ja-JP" altLang="en-US" dirty="0"/>
+              <a:t>要求表示されます</a:t>
+            </a:r>
+            <a:endParaRPr lang="en-US" altLang="ja-JP" dirty="0"/>
+          </a:p>
+          <a:p>
+            <a:r>
+              <a:rPr lang="ja-JP" altLang="en-US" dirty="0"/>
+              <a:t>次に</a:t>
+            </a:r>
             <a:r>
               <a:rPr lang="ja-JP" altLang="ja-JP" dirty="0"/>
-              <a:t>まず、このように使用するアルゴリズムを選択し、VN要求の埋め込みを行います。</a:t>
+              <a:t>使用するアルゴリズムを選択し、VN要求の埋め込みを行います。</a:t>
             </a:r>
           </a:p>
           <a:p>
@@ -1174,7 +1217,7 @@
           </a:p>
           <a:p>
             <a:r>
-              <a:rPr lang="ja-JP" altLang="ja-JP"/>
+              <a:rPr lang="ja-JP" altLang="ja-JP" dirty="0"/>
               <a:t>またALEVINでは、評価値を確認するだけでなく、このようにVN要求が物理ネットワーク上のどのノードやリンクに埋め込まれているのかを、視覚的に確認することもできます。</a:t>
             </a:r>
           </a:p>
@@ -1408,7 +1451,15 @@
           <a:p>
             <a:r>
               <a:rPr lang="ja-JP" altLang="ja-JP" dirty="0"/>
-              <a:t>最後に、アルゴリズムの処理にかかった実行時間を測定しました。</a:t>
+              <a:t>最後に、アルゴリズムの</a:t>
+            </a:r>
+            <a:r>
+              <a:rPr lang="ja-JP" altLang="en-US" dirty="0"/>
+              <a:t>埋め込みに</a:t>
+            </a:r>
+            <a:r>
+              <a:rPr lang="ja-JP" altLang="ja-JP" dirty="0"/>
+              <a:t>にかかった時間を測定しました。</a:t>
             </a:r>
           </a:p>
           <a:p>
@@ -5965,10 +6016,10 @@
       </p:sp>
       <p:sp>
         <p:nvSpPr>
-          <p:cNvPr id="8" name="テキスト ボックス 7">
-            <a:extLst>
-              <a:ext uri="{FF2B5EF4-FFF2-40B4-BE49-F238E27FC236}">
-                <a16:creationId xmlns:a16="http://schemas.microsoft.com/office/drawing/2014/main" id="{091A963F-2004-A801-05C0-C0AE2A699ADA}"/>
+          <p:cNvPr id="9" name="テキスト ボックス 8">
+            <a:extLst>
+              <a:ext uri="{FF2B5EF4-FFF2-40B4-BE49-F238E27FC236}">
+                <a16:creationId xmlns:a16="http://schemas.microsoft.com/office/drawing/2014/main" id="{D280DD44-192D-7E75-369A-814BD8857AEA}"/>
               </a:ext>
             </a:extLst>
           </p:cNvPr>
@@ -5977,46 +6028,7 @@
         </p:nvSpPr>
         <p:spPr>
           <a:xfrm>
-            <a:off x="275924" y="1875811"/>
-            <a:ext cx="3112654" cy="707886"/>
-          </a:xfrm>
-          <a:prstGeom prst="rect">
-            <a:avLst/>
-          </a:prstGeom>
-          <a:noFill/>
-        </p:spPr>
-        <p:txBody>
-          <a:bodyPr wrap="square" rtlCol="0">
-            <a:spAutoFit/>
-          </a:bodyPr>
-          <a:lstStyle/>
-          <a:p>
-            <a:r>
-              <a:rPr kumimoji="1" lang="ja-JP" altLang="en-US" sz="4000" dirty="0">
-                <a:solidFill>
-                  <a:srgbClr val="0B3E8D"/>
-                </a:solidFill>
-              </a:rPr>
-              <a:t>今後の課題</a:t>
-            </a:r>
-          </a:p>
-        </p:txBody>
-      </p:sp>
-      <p:sp>
-        <p:nvSpPr>
-          <p:cNvPr id="9" name="テキスト ボックス 8">
-            <a:extLst>
-              <a:ext uri="{FF2B5EF4-FFF2-40B4-BE49-F238E27FC236}">
-                <a16:creationId xmlns:a16="http://schemas.microsoft.com/office/drawing/2014/main" id="{D280DD44-192D-7E75-369A-814BD8857AEA}"/>
-              </a:ext>
-            </a:extLst>
-          </p:cNvPr>
-          <p:cNvSpPr txBox="1"/>
-          <p:nvPr/>
-        </p:nvSpPr>
-        <p:spPr>
-          <a:xfrm>
-            <a:off x="1679334" y="2743010"/>
+            <a:off x="224589" y="2372281"/>
             <a:ext cx="10207866" cy="3539430"/>
           </a:xfrm>
           <a:prstGeom prst="rect">
@@ -11015,148 +11027,13 @@
                   <a:srgbClr val="113160"/>
                 </a:solidFill>
               </a:rPr>
-              <a:t>考察・まとめ</a:t>
+              <a:t>考察</a:t>
             </a:r>
             <a:endParaRPr kumimoji="1" lang="ja-JP" altLang="en-US" b="1" dirty="0">
               <a:solidFill>
                 <a:srgbClr val="113160"/>
               </a:solidFill>
             </a:endParaRPr>
-          </a:p>
-        </p:txBody>
-      </p:sp>
-      <p:sp>
-        <p:nvSpPr>
-          <p:cNvPr id="6" name="テキスト ボックス 5">
-            <a:extLst>
-              <a:ext uri="{FF2B5EF4-FFF2-40B4-BE49-F238E27FC236}">
-                <a16:creationId xmlns:a16="http://schemas.microsoft.com/office/drawing/2014/main" id="{5106D041-2FA3-CD96-7A92-BC4D6A052436}"/>
-              </a:ext>
-            </a:extLst>
-          </p:cNvPr>
-          <p:cNvSpPr txBox="1"/>
-          <p:nvPr/>
-        </p:nvSpPr>
-        <p:spPr>
-          <a:xfrm>
-            <a:off x="2058670" y="1668802"/>
-            <a:ext cx="1756949" cy="707886"/>
-          </a:xfrm>
-          <a:prstGeom prst="rect">
-            <a:avLst/>
-          </a:prstGeom>
-          <a:noFill/>
-        </p:spPr>
-        <p:txBody>
-          <a:bodyPr wrap="square" rtlCol="0">
-            <a:spAutoFit/>
-          </a:bodyPr>
-          <a:lstStyle/>
-          <a:p>
-            <a:r>
-              <a:rPr kumimoji="1" lang="ja-JP" altLang="en-US" sz="4000" dirty="0">
-                <a:solidFill>
-                  <a:srgbClr val="0B3E8D"/>
-                </a:solidFill>
-              </a:rPr>
-              <a:t>まとめ</a:t>
-            </a:r>
-          </a:p>
-        </p:txBody>
-      </p:sp>
-      <p:sp>
-        <p:nvSpPr>
-          <p:cNvPr id="7" name="テキスト ボックス 6">
-            <a:extLst>
-              <a:ext uri="{FF2B5EF4-FFF2-40B4-BE49-F238E27FC236}">
-                <a16:creationId xmlns:a16="http://schemas.microsoft.com/office/drawing/2014/main" id="{D8C242F4-C2D1-990E-4666-7FC0CE3B5A3A}"/>
-              </a:ext>
-            </a:extLst>
-          </p:cNvPr>
-          <p:cNvSpPr txBox="1"/>
-          <p:nvPr/>
-        </p:nvSpPr>
-        <p:spPr>
-          <a:xfrm>
-            <a:off x="422032" y="2556179"/>
-            <a:ext cx="5500466" cy="3785652"/>
-          </a:xfrm>
-          <a:prstGeom prst="rect">
-            <a:avLst/>
-          </a:prstGeom>
-          <a:noFill/>
-        </p:spPr>
-        <p:txBody>
-          <a:bodyPr wrap="square" rtlCol="0">
-            <a:spAutoFit/>
-          </a:bodyPr>
-          <a:lstStyle/>
-          <a:p>
-            <a:pPr lvl="0"/>
-            <a:r>
-              <a:rPr lang="ja-JP" altLang="en-US" sz="2400" dirty="0"/>
-              <a:t>・</a:t>
-            </a:r>
-            <a:r>
-              <a:rPr lang="ja-JP" altLang="ja-JP" sz="2400" dirty="0"/>
-              <a:t>二ノ宮手法</a:t>
-            </a:r>
-            <a:r>
-              <a:rPr lang="ja-JP" altLang="en-US" sz="2400" dirty="0"/>
-              <a:t>、</a:t>
-            </a:r>
-            <a:r>
-              <a:rPr lang="ja-JP" altLang="ja-JP" sz="2400" dirty="0"/>
-              <a:t>寺生手法</a:t>
-            </a:r>
-            <a:r>
-              <a:rPr lang="ja-JP" altLang="en-US" sz="2400" dirty="0"/>
-              <a:t>、ダイクストラ法を</a:t>
-            </a:r>
-            <a:r>
-              <a:rPr lang="ja-JP" altLang="ja-JP" sz="2400" dirty="0"/>
-              <a:t>ALEVINへ実装し，同一条件で比較した </a:t>
-            </a:r>
-            <a:endParaRPr lang="en-US" altLang="ja-JP" sz="2400" dirty="0"/>
-          </a:p>
-          <a:p>
-            <a:pPr lvl="0"/>
-            <a:endParaRPr lang="ja-JP" altLang="ja-JP" sz="2400" dirty="0"/>
-          </a:p>
-          <a:p>
-            <a:pPr lvl="0"/>
-            <a:r>
-              <a:rPr lang="ja-JP" altLang="en-US" sz="2400" dirty="0"/>
-              <a:t>・</a:t>
-            </a:r>
-            <a:r>
-              <a:rPr lang="ja-JP" altLang="ja-JP" sz="2400" dirty="0"/>
-              <a:t>寺生手法は，受理率で9条件中6条件を上回り，CostRevenueは全条件で</a:t>
-            </a:r>
-            <a:endParaRPr lang="en-US" altLang="ja-JP" sz="2400" dirty="0"/>
-          </a:p>
-          <a:p>
-            <a:pPr lvl="0"/>
-            <a:r>
-              <a:rPr lang="ja-JP" altLang="ja-JP" sz="2400" dirty="0"/>
-              <a:t>小さかった </a:t>
-            </a:r>
-            <a:endParaRPr lang="en-US" altLang="ja-JP" sz="2400" dirty="0"/>
-          </a:p>
-          <a:p>
-            <a:pPr lvl="0"/>
-            <a:endParaRPr lang="ja-JP" altLang="ja-JP" sz="2400" dirty="0"/>
-          </a:p>
-          <a:p>
-            <a:pPr lvl="0"/>
-            <a:r>
-              <a:rPr lang="ja-JP" altLang="en-US" sz="2400" dirty="0"/>
-              <a:t>・</a:t>
-            </a:r>
-            <a:r>
-              <a:rPr lang="ja-JP" altLang="ja-JP" sz="2400" dirty="0"/>
-              <a:t>二ノ宮手法は，全条件で実行時間が短かった</a:t>
-            </a:r>
           </a:p>
         </p:txBody>
       </p:sp>
@@ -11272,10 +11149,10 @@
       </p:sp>
       <p:sp>
         <p:nvSpPr>
-          <p:cNvPr id="11" name="テキスト ボックス 10">
-            <a:extLst>
-              <a:ext uri="{FF2B5EF4-FFF2-40B4-BE49-F238E27FC236}">
-                <a16:creationId xmlns:a16="http://schemas.microsoft.com/office/drawing/2014/main" id="{D1314DC7-320D-5736-9B4A-1E34194109A5}"/>
+          <p:cNvPr id="12" name="テキスト ボックス 11">
+            <a:extLst>
+              <a:ext uri="{FF2B5EF4-FFF2-40B4-BE49-F238E27FC236}">
+                <a16:creationId xmlns:a16="http://schemas.microsoft.com/office/drawing/2014/main" id="{3685769F-C48B-8E3E-8FCE-5D5586C855ED}"/>
               </a:ext>
             </a:extLst>
           </p:cNvPr>
@@ -11284,8 +11161,8 @@
         </p:nvSpPr>
         <p:spPr>
           <a:xfrm>
-            <a:off x="7740230" y="1664395"/>
-            <a:ext cx="1756949" cy="707886"/>
+            <a:off x="712154" y="2186848"/>
+            <a:ext cx="8777835" cy="3385542"/>
           </a:xfrm>
           <a:prstGeom prst="rect">
             <a:avLst/>
@@ -11298,50 +11175,6 @@
           </a:bodyPr>
           <a:lstStyle/>
           <a:p>
-            <a:r>
-              <a:rPr lang="ja-JP" altLang="en-US" sz="4000" dirty="0">
-                <a:solidFill>
-                  <a:srgbClr val="0B3E8D"/>
-                </a:solidFill>
-              </a:rPr>
-              <a:t>考察</a:t>
-            </a:r>
-            <a:endParaRPr kumimoji="1" lang="ja-JP" altLang="en-US" sz="4000" dirty="0">
-              <a:solidFill>
-                <a:srgbClr val="0B3E8D"/>
-              </a:solidFill>
-            </a:endParaRPr>
-          </a:p>
-        </p:txBody>
-      </p:sp>
-      <p:sp>
-        <p:nvSpPr>
-          <p:cNvPr id="12" name="テキスト ボックス 11">
-            <a:extLst>
-              <a:ext uri="{FF2B5EF4-FFF2-40B4-BE49-F238E27FC236}">
-                <a16:creationId xmlns:a16="http://schemas.microsoft.com/office/drawing/2014/main" id="{3685769F-C48B-8E3E-8FCE-5D5586C855ED}"/>
-              </a:ext>
-            </a:extLst>
-          </p:cNvPr>
-          <p:cNvSpPr txBox="1"/>
-          <p:nvPr/>
-        </p:nvSpPr>
-        <p:spPr>
-          <a:xfrm>
-            <a:off x="6095999" y="2556179"/>
-            <a:ext cx="5673969" cy="2954655"/>
-          </a:xfrm>
-          <a:prstGeom prst="rect">
-            <a:avLst/>
-          </a:prstGeom>
-          <a:noFill/>
-        </p:spPr>
-        <p:txBody>
-          <a:bodyPr wrap="square" rtlCol="0">
-            <a:spAutoFit/>
-          </a:bodyPr>
-          <a:lstStyle/>
-          <a:p>
             <a:pPr lvl="0"/>
             <a:r>
               <a:rPr lang="ja-JP" altLang="en-US" sz="2800" dirty="0"/>
@@ -11351,6 +11184,14 @@
               <a:rPr lang="ja-JP" altLang="ja-JP" sz="2800" dirty="0"/>
               <a:t>寺生手法は帯域を考慮するため，リンクマッピングに必要な帯域を確保しやすいと考えられる </a:t>
             </a:r>
+            <a:endParaRPr lang="en-US" altLang="ja-JP" sz="2800" dirty="0"/>
+          </a:p>
+          <a:p>
+            <a:pPr lvl="0"/>
+            <a:endParaRPr lang="en-US" altLang="ja-JP" sz="2800" dirty="0"/>
+          </a:p>
+          <a:p>
+            <a:pPr lvl="0"/>
             <a:endParaRPr lang="en-US" altLang="ja-JP" sz="2800" dirty="0"/>
           </a:p>
           <a:p>

--- a/0次案/卒研発表_nomovie.pptx
+++ b/0次案/卒研発表_nomovie.pptx
@@ -809,6 +809,22 @@
               <a:rPr lang="ja-JP" altLang="ja-JP" dirty="0"/>
               <a:t>まず、本研究で扱う仮想ネットワーク埋め込み問題、VNEについて説明します。</a:t>
             </a:r>
+            <a:endParaRPr lang="en-US" altLang="ja-JP" dirty="0"/>
+          </a:p>
+          <a:p>
+            <a:r>
+              <a:rPr lang="ja-JP" altLang="ja-JP"/>
+              <a:t>VNE（Virtual Network Embedding）とは、仮想ネットワークのノードやリンクを、物理ネットワーク上の資源に割り当てる</a:t>
+            </a:r>
+            <a:r>
+              <a:rPr lang="ja-JP" altLang="en-US"/>
+              <a:t>問題</a:t>
+            </a:r>
+            <a:r>
+              <a:rPr lang="ja-JP" altLang="ja-JP"/>
+              <a:t>である。</a:t>
+            </a:r>
+            <a:endParaRPr lang="ja-JP" altLang="ja-JP" dirty="0"/>
           </a:p>
           <a:p>
             <a:r>
@@ -1060,7 +1076,7 @@
             </a:r>
             <a:r>
               <a:rPr lang="ja-JP" altLang="en-US" dirty="0"/>
-              <a:t>フィッシャーさんによって開発された</a:t>
+              <a:t>フィッシャーによって開発された</a:t>
             </a:r>
             <a:r>
               <a:rPr lang="ja-JP" altLang="ja-JP" dirty="0"/>
